--- a/CorpLnE/12. Minority Shareholder Protection.pptx
+++ b/CorpLnE/12. Minority Shareholder Protection.pptx
@@ -235,7 +235,7 @@
           <a:p>
             <a:fld id="{7E62B2E0-41D4-4BD0-8F27-233CF851A423}" type="datetimeFigureOut">
               <a:rPr lang="en-US" smtClean="0"/>
-              <a:t>8/5/2024</a:t>
+              <a:t>2/21/2026</a:t>
             </a:fld>
             <a:endParaRPr lang="en-US" dirty="0"/>
           </a:p>
@@ -3938,6 +3938,13 @@
             <a:schemeClr val="lt1"/>
           </a:fontRef>
         </p:style>
+        <p:txBody>
+          <a:bodyPr/>
+          <a:lstStyle/>
+          <a:p>
+            <a:endParaRPr lang="en-SG"/>
+          </a:p>
+        </p:txBody>
       </p:sp>
       <p:sp>
         <p:nvSpPr>
@@ -4130,7 +4137,7 @@
           <a:p>
             <a:fld id="{BC9AB8A9-18BE-4EDF-90DD-E48A588FE9E1}" type="datetime1">
               <a:rPr lang="en-US" smtClean="0"/>
-              <a:t>8/5/2024</a:t>
+              <a:t>2/21/2026</a:t>
             </a:fld>
             <a:endParaRPr lang="en-US" dirty="0"/>
           </a:p>
@@ -4392,7 +4399,7 @@
           <a:p>
             <a:fld id="{31C11933-86B0-441A-B639-BD29FDFEFE70}" type="datetime1">
               <a:rPr lang="en-US" smtClean="0"/>
-              <a:t>8/5/2024</a:t>
+              <a:t>2/21/2026</a:t>
             </a:fld>
             <a:endParaRPr lang="en-US" dirty="0"/>
           </a:p>
@@ -4627,7 +4634,7 @@
           <a:p>
             <a:fld id="{74662F02-AFBF-41E7-AC4B-D00C212D7A74}" type="datetime1">
               <a:rPr lang="en-US" smtClean="0"/>
-              <a:t>8/5/2024</a:t>
+              <a:t>2/21/2026</a:t>
             </a:fld>
             <a:endParaRPr lang="en-US" dirty="0"/>
           </a:p>
@@ -4867,7 +4874,7 @@
           <a:p>
             <a:fld id="{5F466308-2A9A-43A3-8189-DAED754C8691}" type="datetime1">
               <a:rPr lang="en-US" smtClean="0"/>
-              <a:t>8/5/2024</a:t>
+              <a:t>2/21/2026</a:t>
             </a:fld>
             <a:endParaRPr lang="en-US" dirty="0"/>
           </a:p>
@@ -5174,7 +5181,7 @@
           <a:p>
             <a:fld id="{FC51178D-1D9D-49FF-BA4D-77D5F3F2ABE7}" type="datetime1">
               <a:rPr lang="en-US" smtClean="0"/>
-              <a:t>8/5/2024</a:t>
+              <a:t>2/21/2026</a:t>
             </a:fld>
             <a:endParaRPr lang="en-US" dirty="0"/>
           </a:p>
@@ -5476,7 +5483,7 @@
           <a:p>
             <a:fld id="{84A73D5F-7352-4D75-84BB-BEEE96694360}" type="datetime1">
               <a:rPr lang="en-US" smtClean="0"/>
-              <a:t>8/5/2024</a:t>
+              <a:t>2/21/2026</a:t>
             </a:fld>
             <a:endParaRPr lang="en-US" dirty="0"/>
           </a:p>
@@ -5898,7 +5905,7 @@
           <a:p>
             <a:fld id="{73AEC2FA-EF00-4A47-8C60-11D9B66273AB}" type="datetime1">
               <a:rPr lang="en-US" smtClean="0"/>
-              <a:t>8/5/2024</a:t>
+              <a:t>2/21/2026</a:t>
             </a:fld>
             <a:endParaRPr lang="en-US" dirty="0"/>
           </a:p>
@@ -6060,7 +6067,7 @@
           <a:p>
             <a:fld id="{69C03762-E4E4-41FB-87AC-4875A8A25370}" type="datetime1">
               <a:rPr lang="en-US" smtClean="0"/>
-              <a:t>8/5/2024</a:t>
+              <a:t>2/21/2026</a:t>
             </a:fld>
             <a:endParaRPr lang="en-US" dirty="0"/>
           </a:p>
@@ -6155,7 +6162,7 @@
           <a:p>
             <a:fld id="{663153EE-997E-48D6-BC05-B28D307B015C}" type="datetime1">
               <a:rPr lang="en-US" smtClean="0"/>
-              <a:t>8/5/2024</a:t>
+              <a:t>2/21/2026</a:t>
             </a:fld>
             <a:endParaRPr lang="en-US" dirty="0"/>
           </a:p>
@@ -6533,7 +6540,7 @@
           <a:p>
             <a:fld id="{E67CB83A-8CDA-4EB5-9F88-80628B7C644C}" type="datetime1">
               <a:rPr lang="en-US" smtClean="0"/>
-              <a:t>8/5/2024</a:t>
+              <a:t>2/21/2026</a:t>
             </a:fld>
             <a:endParaRPr lang="en-US" dirty="0"/>
           </a:p>
@@ -6821,7 +6828,7 @@
           <a:p>
             <a:fld id="{22FEB533-51F5-4A09-A69B-BDA5FA92A366}" type="datetime1">
               <a:rPr lang="en-US" smtClean="0"/>
-              <a:t>8/5/2024</a:t>
+              <a:t>2/21/2026</a:t>
             </a:fld>
             <a:endParaRPr lang="en-US" dirty="0"/>
           </a:p>
@@ -7032,7 +7039,7 @@
           <a:p>
             <a:fld id="{64819377-49A4-4FAF-9376-1B9935A96765}" type="datetime1">
               <a:rPr lang="en-US" smtClean="0"/>
-              <a:t>8/5/2024</a:t>
+              <a:t>2/21/2026</a:t>
             </a:fld>
             <a:endParaRPr lang="en-US" dirty="0"/>
           </a:p>
@@ -7148,6 +7155,13 @@
             <a:schemeClr val="lt1"/>
           </a:fontRef>
         </p:style>
+        <p:txBody>
+          <a:bodyPr/>
+          <a:lstStyle/>
+          <a:p>
+            <a:endParaRPr lang="en-SG"/>
+          </a:p>
+        </p:txBody>
       </p:sp>
       <p:sp>
         <p:nvSpPr>
@@ -7185,6 +7199,13 @@
             <a:schemeClr val="lt1"/>
           </a:fontRef>
         </p:style>
+        <p:txBody>
+          <a:bodyPr/>
+          <a:lstStyle/>
+          <a:p>
+            <a:endParaRPr lang="en-SG"/>
+          </a:p>
+        </p:txBody>
       </p:sp>
       <p:sp>
         <p:nvSpPr>
@@ -7222,6 +7243,13 @@
             <a:schemeClr val="lt1"/>
           </a:fontRef>
         </p:style>
+        <p:txBody>
+          <a:bodyPr/>
+          <a:lstStyle/>
+          <a:p>
+            <a:endParaRPr lang="en-SG"/>
+          </a:p>
+        </p:txBody>
       </p:sp>
     </p:spTree>
     <p:extLst>
@@ -15737,8 +15765,13 @@
           <a:p>
             <a:r>
               <a:rPr lang="en-US" dirty="0"/>
-              <a:t>In general, the majority shareholders will be able to use their powers (note: this assumes that such powers are delegated to the shareholders as a whole and not the board) to act opportunistically against the minority shareholders</a:t>
-            </a:r>
+              <a:t>In general, the majority shareholders will be able to use their powers (note: this assumes that such powers are delegated to the shareholders as a whole and not the board) to act opportunistically against the </a:t>
+            </a:r>
+            <a:r>
+              <a:rPr lang="en-US"/>
+              <a:t>minority shareholders.</a:t>
+            </a:r>
+            <a:endParaRPr lang="en-US" dirty="0"/>
           </a:p>
           <a:p>
             <a:pPr lvl="1"/>
